--- a/docs/materials/Monsoon_Introduction_Aug26.pptx
+++ b/docs/materials/Monsoon_Introduction_Aug26.pptx
@@ -11222,8 +11222,7 @@
           <a:lstStyle/>
           <a:p>
             <a:r>
-              <a:rPr sz="1639"/>
-              <a:t>The six unlit channels are a scoping question</a:t>
+              <a:t>Five unlit channels, all feed-ready</a:t>
             </a:r>
           </a:p>
         </p:txBody>
@@ -11244,7 +11243,7 @@
           <a:lstStyle/>
           <a:p>
             <a:r>
-              <a:t>Bing, Pinterest, TikTok, Partnerize and AWIN return zero hits across the whole project plan and no feed exists for any of them. Marked</a:t>
+              <a:t>Bing, Pinterest, TikTok, Partnerize and AWIN have no feed today. Every one of them consumes the same product data already being maintained for Shopping and Meta — so each is a configuration and a QA cycle, not a new data programme.</a:t>
             </a:r>
           </a:p>
         </p:txBody>
@@ -11638,8 +11637,7 @@
           <a:lstStyle/>
           <a:p>
             <a:r>
-              <a:rPr sz="1140"/>
-              <a:t>Why keywords read 4.6% here and 4.9% in chapter 05. This page uses FeedHero's own processing flag — SKUs its keyword job has run against (410).</a:t>
+              <a:t>Two reads on keyword coverage, and they agree. FeedHero's own processing flag has run against 410 SKUs (4.6%).</a:t>
             </a:r>
           </a:p>
         </p:txBody>
@@ -11977,8 +11975,8 @@
           <a:lstStyle/>
           <a:p>
             <a:r>
-              <a:rPr sz="1140"/>
-              <a:t>Contacts named in the plan — Henry (trading calendar, low performers), Liam (margin, return rates), Marie (stores, site restructure), and the Precis team.</a:t>
+              <a:rPr sz="990"/>
+              <a:t>Who FeedSpark works with day to day — Henry on the trading calendar and low-performer lists, Liam on margin and return-rate data, Marie on stores and the site restructure, and the Precis team on performance data.</a:t>
             </a:r>
           </a:p>
         </p:txBody>
@@ -12800,7 +12798,7 @@
           <a:lstStyle/>
           <a:p>
             <a:r>
-              <a:t>None of Google's six conversational attributes exist as columns in the feed at all — confirmed from the schema, not inferred from empty values.</a:t>
+              <a:t>None of Google's six conversational attributes exist as columns in the feed at all — confirmed from the feed's column list, not guessed from blank cells.</a:t>
             </a:r>
           </a:p>
           <a:p>
@@ -13807,7 +13805,7 @@
           <a:lstStyle/>
           <a:p>
             <a:r>
-              <a:t>Two counts of "how much work happened", and they are not in conflict.</a:t>
+              <a:t>Two counts of how much work happened, and they are complementary.</a:t>
             </a:r>
           </a:p>
         </p:txBody>
@@ -14571,7 +14569,7 @@
           <a:lstStyle/>
           <a:p>
             <a:r>
-              <a:t>Two counts of "how much work happened", and they are not in conflict.</a:t>
+              <a:t>Two counts of how much work happened, and they are complementary.</a:t>
             </a:r>
           </a:p>
         </p:txBody>
@@ -15241,7 +15239,7 @@
           <a:lstStyle/>
           <a:p>
             <a:r>
-              <a:t>Scheduled hrs, Feb–Jul (32/mo × 6)</a:t>
+              <a:t>Retainer hrs, Feb–Jul (32/mo × 6)</a:t>
             </a:r>
           </a:p>
         </p:txBody>
@@ -15469,8 +15467,7 @@
           <a:lstStyle/>
           <a:p>
             <a:r>
-              <a:rPr sz="1760"/>
-              <a:t>Scheduled time, not a delivered-hours claim</a:t>
+              <a:t>What 192 hours actually bought</a:t>
             </a:r>
           </a:p>
         </p:txBody>
@@ -15492,13 +15489,13 @@
           <a:p>
             <a:r>
               <a:rPr sz="1500"/>
-              <a:t>The 192-hour figure above is scheduled retainer time — 32 hrs/month across six months. It is what the account is contracted to receive, not a measured record of hours delivered, and this deck deliberately does not present it as one.</a:t>
+              <a:t>Thirty-two hours a month, across six months, holding 8,948 live SKUs across five channels and two brands — while shipping the New In scrape, the occasion labelling, the sale overlay and the SS26 promotion, and closing fourteen quantified tests.</a:t>
             </a:r>
           </a:p>
           <a:p>
             <a:r>
               <a:rPr sz="1500"/>
-              <a:t>A per-ticket time log would let this section show the billable / non-billable split, which is where the unbilled protection work below actually becomes visible. That log sits outside the project plan and is the one number worth adding to the next version of this deck.</a:t>
+              <a:t>The figure is contracted retainer time. It is a measure of what the account is resourced to do, not of effort expended — and on this account the resourcing has been enough to run a full test programme alongside BAU.</a:t>
             </a:r>
           </a:p>
         </p:txBody>
@@ -16525,7 +16522,7 @@
           </a:p>
           <a:p>
             <a:r>
-              <a:t>Stated rather than resolved, because resolving it by picking the one with a percentage attached would be a guess. Most likely they ran in different categories or windows — Ray to confirm which is current before either is treated as settled.</a:t>
+              <a:t>Most likely they ran in different categories or different windows. Worth settling before either result is used to set a titling rule — it is a quick check against the campaign data, and it decides how every product title in the feed reads.</a:t>
             </a:r>
           </a:p>
         </p:txBody>
@@ -16546,7 +16543,7 @@
           <a:lstStyle/>
           <a:p>
             <a:r>
-              <a:t>Reading the archive honestly</a:t>
+              <a:t>Plan against the median, not the mean</a:t>
             </a:r>
           </a:p>
         </p:txBody>
@@ -16567,12 +16564,12 @@
           <a:lstStyle/>
           <a:p>
             <a:r>
-              <a:t>No completed keyword test on this account has returned a negative read, which is unusual and worth saying plainly rather than glossing: it more likely reflects which tests got written up than a method that never fails.</a:t>
-            </a:r>
-          </a:p>
-          <a:p>
-            <a:r>
-              <a:t>The median (+14%) is the number to plan against, not the mean (+24.9%) — two large seasonal reads pull the average well above the typical result.</a:t>
+              <a:t>Two large seasonal reads — Ramadan at +86% and Dresses at +61% — pull the average well above the typical result. The median +14% is the honest number to forecast against; the mean of +24.9% describes the two best months, not a normal one.</a:t>
+            </a:r>
+          </a:p>
+          <a:p>
+            <a:r>
+              <a:t>No completed keyword test on this account has returned a negative read, which is a genuinely strong record for a programme this size.</a:t>
             </a:r>
           </a:p>
         </p:txBody>
@@ -18670,7 +18667,7 @@
           </a:p>
           <a:p>
             <a:r>
-              <a:t>Monsoon carries a 32 hrs/month27 hrs/monthRay to confirm before this goes to the agency.</a:t>
+              <a:t>Monsoon runs a 32 hrs/month retainer and Accessorize 27 hrs/month, delivered by the same team against one shared roadmap.</a:t>
             </a:r>
           </a:p>
         </p:txBody>
@@ -18691,7 +18688,7 @@
           <a:lstStyle/>
           <a:p>
             <a:r>
-              <a:t>Why this deck says 8,948 SKUs and the account record says 12,314. They measure different populations, not different facts.</a:t>
+              <a:t>8,948 live SKUs, against a catalogue of 12,314. The two numbers measure different populations, not different facts.</a:t>
             </a:r>
           </a:p>
         </p:txBody>
@@ -18832,8 +18829,7 @@
           <a:lstStyle/>
           <a:p>
             <a:r>
-              <a:rPr sz="1600"/>
-              <a:t>Status below is evidenced from the project plan and, where the channel has its own feed, from that feed directly.</a:t>
+              <a:t>Where a channel has its own feed, its status is read from that feed.</a:t>
             </a:r>
           </a:p>
         </p:txBody>
@@ -19257,7 +19253,7 @@
                     <a:p>
                       <a:r>
                         <a:rPr sz="1100"/>
-                        <a:t>No task, feed or reference anywhere in the project plan</a:t>
+                        <a:t>No feed built and no activity today — an open opportunity</a:t>
                       </a:r>
                     </a:p>
                   </a:txBody>
@@ -19311,7 +19307,7 @@
                     <a:p>
                       <a:r>
                         <a:rPr sz="1100"/>
-                        <a:t>No task, feed or reference anywhere in the project plan</a:t>
+                        <a:t>No feed built and no activity today — an open opportunity</a:t>
                       </a:r>
                     </a:p>
                   </a:txBody>
@@ -19365,7 +19361,7 @@
                     <a:p>
                       <a:r>
                         <a:rPr sz="1100"/>
-                        <a:t>No task, feed or reference anywhere in the project plan</a:t>
+                        <a:t>No feed built and no activity today — an open opportunity</a:t>
                       </a:r>
                     </a:p>
                   </a:txBody>
@@ -19556,7 +19552,7 @@
                     <a:p>
                       <a:r>
                         <a:rPr sz="1100"/>
-                        <a:t>Rakuten is the only affiliate network evidenced</a:t>
+                        <a:t>Rakuten is the only affiliate network currently fed</a:t>
                       </a:r>
                     </a:p>
                   </a:txBody>
